--- a/intern_wishbone.pptx
+++ b/intern_wishbone.pptx
@@ -5,7 +5,7 @@
     <p:sldMasterId id="2147483648" r:id="rId1"/>
   </p:sldMasterIdLst>
   <p:notesMasterIdLst>
-    <p:notesMasterId r:id="rId14"/>
+    <p:notesMasterId r:id="rId16"/>
   </p:notesMasterIdLst>
   <p:sldIdLst>
     <p:sldId id="256" r:id="rId4"/>
@@ -18,6 +18,8 @@
     <p:sldId id="263" r:id="rId11"/>
     <p:sldId id="264" r:id="rId12"/>
     <p:sldId id="265" r:id="rId13"/>
+    <p:sldId id="266" r:id="rId14"/>
+    <p:sldId id="267" r:id="rId15"/>
   </p:sldIdLst>
   <p:sldSz cx="12192000" cy="6858000"/>
   <p:notesSz cx="6858000" cy="9144000"/>
@@ -143,7 +145,7 @@
       </p:grpSpPr>
       <p:sp>
         <p:nvSpPr>
-          <p:cNvPr id="879949889" name="Header Placeholder 1"/>
+          <p:cNvPr id="80627543" name="Header Placeholder 1"/>
           <p:cNvSpPr>
             <a:spLocks noGrp="1"/>
           </p:cNvSpPr>
@@ -177,7 +179,7 @@
       </p:sp>
       <p:sp>
         <p:nvSpPr>
-          <p:cNvPr id="890511598" name="Date Placeholder 2"/>
+          <p:cNvPr id="953536580" name="Date Placeholder 2"/>
           <p:cNvSpPr>
             <a:spLocks noGrp="1"/>
           </p:cNvSpPr>
@@ -215,7 +217,7 @@
       </p:sp>
       <p:sp>
         <p:nvSpPr>
-          <p:cNvPr id="1916815780" name="Slide Image Placeholder 3"/>
+          <p:cNvPr id="1219088596" name="Slide Image Placeholder 3"/>
           <p:cNvSpPr>
             <a:spLocks noChangeAspect="1" noGrp="1" noRot="1"/>
           </p:cNvSpPr>
@@ -251,7 +253,7 @@
       </p:sp>
       <p:sp>
         <p:nvSpPr>
-          <p:cNvPr id="1459022523" name="Notes Placeholder 4"/>
+          <p:cNvPr id="431466865" name="Notes Placeholder 4"/>
           <p:cNvSpPr>
             <a:spLocks noGrp="1"/>
           </p:cNvSpPr>
@@ -325,7 +327,7 @@
       </p:sp>
       <p:sp>
         <p:nvSpPr>
-          <p:cNvPr id="43773299" name="Footer Placeholder 5"/>
+          <p:cNvPr id="1639676734" name="Footer Placeholder 5"/>
           <p:cNvSpPr>
             <a:spLocks noGrp="1"/>
           </p:cNvSpPr>
@@ -359,7 +361,7 @@
       </p:sp>
       <p:sp>
         <p:nvSpPr>
-          <p:cNvPr id="1966122229" name="Slide Number Placeholder 6"/>
+          <p:cNvPr id="473554757" name="Slide Number Placeholder 6"/>
           <p:cNvSpPr>
             <a:spLocks noGrp="1"/>
           </p:cNvSpPr>
@@ -512,7 +514,7 @@
       </p:grpSpPr>
       <p:sp>
         <p:nvSpPr>
-          <p:cNvPr id="1449660454" name="Slide Image Placeholder 1"/>
+          <p:cNvPr id="935223145" name="Slide Image Placeholder 1"/>
           <p:cNvSpPr>
             <a:spLocks noChangeAspect="1" noGrp="1" noRot="1"/>
           </p:cNvSpPr>
@@ -529,7 +531,7 @@
       </p:sp>
       <p:sp>
         <p:nvSpPr>
-          <p:cNvPr id="1473000333" name="Notes Placeholder 2"/>
+          <p:cNvPr id="333471669" name="Notes Placeholder 2"/>
           <p:cNvSpPr>
             <a:spLocks noGrp="1"/>
           </p:cNvSpPr>
@@ -554,7 +556,7 @@
       </p:sp>
       <p:sp>
         <p:nvSpPr>
-          <p:cNvPr id="1269220188" name="Slide Number Placeholder 3"/>
+          <p:cNvPr id="2096142621" name="Slide Number Placeholder 3"/>
           <p:cNvSpPr>
             <a:spLocks noGrp="1"/>
           </p:cNvSpPr>
@@ -602,7 +604,7 @@
       </p:grpSpPr>
       <p:sp>
         <p:nvSpPr>
-          <p:cNvPr id="1924918675" name="Slide Image Placeholder 1"/>
+          <p:cNvPr id="2" name="Slide Image Placeholder 1"/>
           <p:cNvSpPr>
             <a:spLocks noChangeAspect="1" noGrp="1" noRot="1"/>
           </p:cNvSpPr>
@@ -614,7 +616,7 @@
       </p:sp>
       <p:sp>
         <p:nvSpPr>
-          <p:cNvPr id="1731304273" name="Notes Placeholder 2"/>
+          <p:cNvPr id="3" name="Notes Placeholder 2"/>
           <p:cNvSpPr>
             <a:spLocks noGrp="1"/>
           </p:cNvSpPr>
@@ -636,7 +638,171 @@
       </p:sp>
       <p:sp>
         <p:nvSpPr>
-          <p:cNvPr id="1794682422" name="Slide Number Placeholder 3"/>
+          <p:cNvPr id="4" name="Slide Number Placeholder 3"/>
+          <p:cNvSpPr>
+            <a:spLocks noGrp="1"/>
+          </p:cNvSpPr>
+          <p:nvPr>
+            <p:ph type="sldNum" sz="quarter" idx="10"/>
+          </p:nvPr>
+        </p:nvSpPr>
+        <p:spPr bwMode="auto"/>
+        <p:txBody>
+          <a:bodyPr/>
+          <a:lstStyle/>
+          <a:p>
+            <a:pPr>
+              <a:defRPr/>
+            </a:pPr>
+            <a:fld id="{596F4B03-9A92-E812-CE8B-BD512737A5AA}" type="slidenum">
+              <a:rPr/>
+              <a:t/>
+            </a:fld>
+            <a:endParaRPr/>
+          </a:p>
+        </p:txBody>
+      </p:sp>
+    </p:spTree>
+  </p:cSld>
+</p:notes>
+</file>
+
+<file path=ppt/notesSlides/notesSlide11.xml><?xml version="1.0" encoding="utf-8"?>
+<p:notes xmlns:a="http://schemas.openxmlformats.org/drawingml/2006/main" xmlns:r="http://schemas.openxmlformats.org/officeDocument/2006/relationships" xmlns:p="http://schemas.openxmlformats.org/presentationml/2006/main" xmlns:m="http://schemas.openxmlformats.org/officeDocument/2006/math" xmlns:w="http://schemas.openxmlformats.org/wordprocessingml/2006/main">
+  <p:cSld name="">
+    <p:spTree>
+      <p:nvGrpSpPr>
+        <p:cNvPr id="1" name=""/>
+        <p:cNvGrpSpPr/>
+        <p:nvPr/>
+      </p:nvGrpSpPr>
+      <p:grpSpPr bwMode="auto">
+        <a:xfrm>
+          <a:off x="0" y="0"/>
+          <a:ext cx="0" cy="0"/>
+          <a:chOff x="0" y="0"/>
+          <a:chExt cx="0" cy="0"/>
+        </a:xfrm>
+      </p:grpSpPr>
+      <p:sp>
+        <p:nvSpPr>
+          <p:cNvPr id="2" name="Slide Image Placeholder 1"/>
+          <p:cNvSpPr>
+            <a:spLocks noChangeAspect="1" noGrp="1" noRot="1"/>
+          </p:cNvSpPr>
+          <p:nvPr>
+            <p:ph type="sldImg"/>
+          </p:nvPr>
+        </p:nvSpPr>
+        <p:spPr bwMode="auto"/>
+      </p:sp>
+      <p:sp>
+        <p:nvSpPr>
+          <p:cNvPr id="3" name="Notes Placeholder 2"/>
+          <p:cNvSpPr>
+            <a:spLocks noGrp="1"/>
+          </p:cNvSpPr>
+          <p:nvPr>
+            <p:ph type="body" idx="1"/>
+          </p:nvPr>
+        </p:nvSpPr>
+        <p:spPr bwMode="auto"/>
+        <p:txBody>
+          <a:bodyPr/>
+          <a:lstStyle/>
+          <a:p>
+            <a:pPr>
+              <a:defRPr/>
+            </a:pPr>
+            <a:endParaRPr/>
+          </a:p>
+        </p:txBody>
+      </p:sp>
+      <p:sp>
+        <p:nvSpPr>
+          <p:cNvPr id="4" name="Slide Number Placeholder 3"/>
+          <p:cNvSpPr>
+            <a:spLocks noGrp="1"/>
+          </p:cNvSpPr>
+          <p:nvPr>
+            <p:ph type="sldNum" sz="quarter" idx="10"/>
+          </p:nvPr>
+        </p:nvSpPr>
+        <p:spPr bwMode="auto"/>
+        <p:txBody>
+          <a:bodyPr/>
+          <a:lstStyle/>
+          <a:p>
+            <a:pPr>
+              <a:defRPr/>
+            </a:pPr>
+            <a:fld id="{D0BB37A7-A0D5-6A91-6E51-814C590062B9}" type="slidenum">
+              <a:rPr/>
+              <a:t/>
+            </a:fld>
+            <a:endParaRPr/>
+          </a:p>
+        </p:txBody>
+      </p:sp>
+    </p:spTree>
+  </p:cSld>
+</p:notes>
+</file>
+
+<file path=ppt/notesSlides/notesSlide12.xml><?xml version="1.0" encoding="utf-8"?>
+<p:notes xmlns:a="http://schemas.openxmlformats.org/drawingml/2006/main" xmlns:r="http://schemas.openxmlformats.org/officeDocument/2006/relationships" xmlns:p="http://schemas.openxmlformats.org/presentationml/2006/main" xmlns:m="http://schemas.openxmlformats.org/officeDocument/2006/math" xmlns:w="http://schemas.openxmlformats.org/wordprocessingml/2006/main">
+  <p:cSld name="">
+    <p:spTree>
+      <p:nvGrpSpPr>
+        <p:cNvPr id="1" name=""/>
+        <p:cNvGrpSpPr/>
+        <p:nvPr/>
+      </p:nvGrpSpPr>
+      <p:grpSpPr bwMode="auto">
+        <a:xfrm>
+          <a:off x="0" y="0"/>
+          <a:ext cx="0" cy="0"/>
+          <a:chOff x="0" y="0"/>
+          <a:chExt cx="0" cy="0"/>
+        </a:xfrm>
+      </p:grpSpPr>
+      <p:sp>
+        <p:nvSpPr>
+          <p:cNvPr id="145028854" name="Slide Image Placeholder 1"/>
+          <p:cNvSpPr>
+            <a:spLocks noChangeAspect="1" noGrp="1" noRot="1"/>
+          </p:cNvSpPr>
+          <p:nvPr>
+            <p:ph type="sldImg"/>
+          </p:nvPr>
+        </p:nvSpPr>
+        <p:spPr bwMode="auto"/>
+      </p:sp>
+      <p:sp>
+        <p:nvSpPr>
+          <p:cNvPr id="1931168145" name="Notes Placeholder 2"/>
+          <p:cNvSpPr>
+            <a:spLocks noGrp="1"/>
+          </p:cNvSpPr>
+          <p:nvPr>
+            <p:ph type="body" idx="1"/>
+          </p:nvPr>
+        </p:nvSpPr>
+        <p:spPr bwMode="auto"/>
+        <p:txBody>
+          <a:bodyPr/>
+          <a:lstStyle/>
+          <a:p>
+            <a:pPr>
+              <a:defRPr/>
+            </a:pPr>
+            <a:endParaRPr/>
+          </a:p>
+        </p:txBody>
+      </p:sp>
+      <p:sp>
+        <p:nvSpPr>
+          <p:cNvPr id="406480963" name="Slide Number Placeholder 3"/>
           <p:cNvSpPr>
             <a:spLocks noGrp="1"/>
           </p:cNvSpPr>
@@ -684,7 +850,7 @@
       </p:grpSpPr>
       <p:sp>
         <p:nvSpPr>
-          <p:cNvPr id="2136578083" name="Slide Image Placeholder 1"/>
+          <p:cNvPr id="1966621982" name="Slide Image Placeholder 1"/>
           <p:cNvSpPr>
             <a:spLocks noChangeAspect="1" noGrp="1" noRot="1"/>
           </p:cNvSpPr>
@@ -696,7 +862,7 @@
       </p:sp>
       <p:sp>
         <p:nvSpPr>
-          <p:cNvPr id="1129344073" name="Notes Placeholder 2"/>
+          <p:cNvPr id="1140358839" name="Notes Placeholder 2"/>
           <p:cNvSpPr>
             <a:spLocks noGrp="1"/>
           </p:cNvSpPr>
@@ -718,7 +884,7 @@
       </p:sp>
       <p:sp>
         <p:nvSpPr>
-          <p:cNvPr id="721129515" name="Slide Number Placeholder 3"/>
+          <p:cNvPr id="1341262618" name="Slide Number Placeholder 3"/>
           <p:cNvSpPr>
             <a:spLocks noGrp="1"/>
           </p:cNvSpPr>
@@ -766,7 +932,7 @@
       </p:grpSpPr>
       <p:sp>
         <p:nvSpPr>
-          <p:cNvPr id="183710461" name="Slide Image Placeholder 1"/>
+          <p:cNvPr id="817624217" name="Slide Image Placeholder 1"/>
           <p:cNvSpPr>
             <a:spLocks noChangeAspect="1" noGrp="1" noRot="1"/>
           </p:cNvSpPr>
@@ -778,7 +944,7 @@
       </p:sp>
       <p:sp>
         <p:nvSpPr>
-          <p:cNvPr id="494057236" name="Notes Placeholder 2"/>
+          <p:cNvPr id="283725258" name="Notes Placeholder 2"/>
           <p:cNvSpPr>
             <a:spLocks noGrp="1"/>
           </p:cNvSpPr>
@@ -800,7 +966,7 @@
       </p:sp>
       <p:sp>
         <p:nvSpPr>
-          <p:cNvPr id="468275185" name="Slide Number Placeholder 3"/>
+          <p:cNvPr id="2028837276" name="Slide Number Placeholder 3"/>
           <p:cNvSpPr>
             <a:spLocks noGrp="1"/>
           </p:cNvSpPr>
@@ -848,7 +1014,7 @@
       </p:grpSpPr>
       <p:sp>
         <p:nvSpPr>
-          <p:cNvPr id="456849882" name="Slide Image Placeholder 1"/>
+          <p:cNvPr id="420864702" name="Slide Image Placeholder 1"/>
           <p:cNvSpPr>
             <a:spLocks noChangeAspect="1" noGrp="1" noRot="1"/>
           </p:cNvSpPr>
@@ -860,7 +1026,7 @@
       </p:sp>
       <p:sp>
         <p:nvSpPr>
-          <p:cNvPr id="1081084354" name="Notes Placeholder 2"/>
+          <p:cNvPr id="1743306334" name="Notes Placeholder 2"/>
           <p:cNvSpPr>
             <a:spLocks noGrp="1"/>
           </p:cNvSpPr>
@@ -882,7 +1048,7 @@
       </p:sp>
       <p:sp>
         <p:nvSpPr>
-          <p:cNvPr id="1058519055" name="Slide Number Placeholder 3"/>
+          <p:cNvPr id="1016953165" name="Slide Number Placeholder 3"/>
           <p:cNvSpPr>
             <a:spLocks noGrp="1"/>
           </p:cNvSpPr>
@@ -930,7 +1096,7 @@
       </p:grpSpPr>
       <p:sp>
         <p:nvSpPr>
-          <p:cNvPr id="558008911" name="Slide Image Placeholder 1"/>
+          <p:cNvPr id="862430636" name="Slide Image Placeholder 1"/>
           <p:cNvSpPr>
             <a:spLocks noChangeAspect="1" noGrp="1" noRot="1"/>
           </p:cNvSpPr>
@@ -942,7 +1108,7 @@
       </p:sp>
       <p:sp>
         <p:nvSpPr>
-          <p:cNvPr id="289416580" name="Notes Placeholder 2"/>
+          <p:cNvPr id="547123992" name="Notes Placeholder 2"/>
           <p:cNvSpPr>
             <a:spLocks noGrp="1"/>
           </p:cNvSpPr>
@@ -964,7 +1130,7 @@
       </p:sp>
       <p:sp>
         <p:nvSpPr>
-          <p:cNvPr id="1261510973" name="Slide Number Placeholder 3"/>
+          <p:cNvPr id="872365491" name="Slide Number Placeholder 3"/>
           <p:cNvSpPr>
             <a:spLocks noGrp="1"/>
           </p:cNvSpPr>
@@ -1012,7 +1178,7 @@
       </p:grpSpPr>
       <p:sp>
         <p:nvSpPr>
-          <p:cNvPr id="1765411562" name="Slide Image Placeholder 1"/>
+          <p:cNvPr id="2060900255" name="Slide Image Placeholder 1"/>
           <p:cNvSpPr>
             <a:spLocks noChangeAspect="1" noGrp="1" noRot="1"/>
           </p:cNvSpPr>
@@ -1024,7 +1190,7 @@
       </p:sp>
       <p:sp>
         <p:nvSpPr>
-          <p:cNvPr id="418711743" name="Notes Placeholder 2"/>
+          <p:cNvPr id="995080482" name="Notes Placeholder 2"/>
           <p:cNvSpPr>
             <a:spLocks noGrp="1"/>
           </p:cNvSpPr>
@@ -1046,7 +1212,7 @@
       </p:sp>
       <p:sp>
         <p:nvSpPr>
-          <p:cNvPr id="5700643" name="Slide Number Placeholder 3"/>
+          <p:cNvPr id="557037983" name="Slide Number Placeholder 3"/>
           <p:cNvSpPr>
             <a:spLocks noGrp="1"/>
           </p:cNvSpPr>
@@ -1094,7 +1260,7 @@
       </p:grpSpPr>
       <p:sp>
         <p:nvSpPr>
-          <p:cNvPr id="281765493" name="Slide Image Placeholder 1"/>
+          <p:cNvPr id="301288581" name="Slide Image Placeholder 1"/>
           <p:cNvSpPr>
             <a:spLocks noChangeAspect="1" noGrp="1" noRot="1"/>
           </p:cNvSpPr>
@@ -1106,7 +1272,7 @@
       </p:sp>
       <p:sp>
         <p:nvSpPr>
-          <p:cNvPr id="439748260" name="Notes Placeholder 2"/>
+          <p:cNvPr id="453660987" name="Notes Placeholder 2"/>
           <p:cNvSpPr>
             <a:spLocks noGrp="1"/>
           </p:cNvSpPr>
@@ -1128,7 +1294,7 @@
       </p:sp>
       <p:sp>
         <p:nvSpPr>
-          <p:cNvPr id="267995216" name="Slide Number Placeholder 3"/>
+          <p:cNvPr id="44024452" name="Slide Number Placeholder 3"/>
           <p:cNvSpPr>
             <a:spLocks noGrp="1"/>
           </p:cNvSpPr>
@@ -1176,7 +1342,7 @@
       </p:grpSpPr>
       <p:sp>
         <p:nvSpPr>
-          <p:cNvPr id="746391762" name="Slide Image Placeholder 1"/>
+          <p:cNvPr id="1413697668" name="Slide Image Placeholder 1"/>
           <p:cNvSpPr>
             <a:spLocks noChangeAspect="1" noGrp="1" noRot="1"/>
           </p:cNvSpPr>
@@ -1188,7 +1354,7 @@
       </p:sp>
       <p:sp>
         <p:nvSpPr>
-          <p:cNvPr id="309031871" name="Notes Placeholder 2"/>
+          <p:cNvPr id="1710795967" name="Notes Placeholder 2"/>
           <p:cNvSpPr>
             <a:spLocks noGrp="1"/>
           </p:cNvSpPr>
@@ -1210,7 +1376,7 @@
       </p:sp>
       <p:sp>
         <p:nvSpPr>
-          <p:cNvPr id="697992361" name="Slide Number Placeholder 3"/>
+          <p:cNvPr id="235394864" name="Slide Number Placeholder 3"/>
           <p:cNvSpPr>
             <a:spLocks noGrp="1"/>
           </p:cNvSpPr>
@@ -1258,7 +1424,7 @@
       </p:grpSpPr>
       <p:sp>
         <p:nvSpPr>
-          <p:cNvPr id="2" name="Slide Image Placeholder 1"/>
+          <p:cNvPr id="1972197463" name="Slide Image Placeholder 1"/>
           <p:cNvSpPr>
             <a:spLocks noChangeAspect="1" noGrp="1" noRot="1"/>
           </p:cNvSpPr>
@@ -1270,7 +1436,7 @@
       </p:sp>
       <p:sp>
         <p:nvSpPr>
-          <p:cNvPr id="3" name="Notes Placeholder 2"/>
+          <p:cNvPr id="2024736428" name="Notes Placeholder 2"/>
           <p:cNvSpPr>
             <a:spLocks noGrp="1"/>
           </p:cNvSpPr>
@@ -1292,7 +1458,7 @@
       </p:sp>
       <p:sp>
         <p:nvSpPr>
-          <p:cNvPr id="4" name="Slide Number Placeholder 3"/>
+          <p:cNvPr id="960352285" name="Slide Number Placeholder 3"/>
           <p:cNvSpPr>
             <a:spLocks noGrp="1"/>
           </p:cNvSpPr>
@@ -1340,7 +1506,7 @@
       </p:grpSpPr>
       <p:sp>
         <p:nvSpPr>
-          <p:cNvPr id="949605499" name="Title 1"/>
+          <p:cNvPr id="1244874890" name="Title 1"/>
           <p:cNvSpPr>
             <a:spLocks noGrp="1"/>
           </p:cNvSpPr>
@@ -1375,7 +1541,7 @@
       </p:sp>
       <p:sp>
         <p:nvSpPr>
-          <p:cNvPr id="1932674182" name="Subtitle 2"/>
+          <p:cNvPr id="631083493" name="Subtitle 2"/>
           <p:cNvSpPr>
             <a:spLocks noGrp="1"/>
           </p:cNvSpPr>
@@ -1443,7 +1609,7 @@
       </p:sp>
       <p:sp>
         <p:nvSpPr>
-          <p:cNvPr id="623531548" name="Date Placeholder 3"/>
+          <p:cNvPr id="2039822883" name="Date Placeholder 3"/>
           <p:cNvSpPr>
             <a:spLocks noGrp="1"/>
           </p:cNvSpPr>
@@ -1469,7 +1635,7 @@
       </p:sp>
       <p:sp>
         <p:nvSpPr>
-          <p:cNvPr id="1748110350" name="Footer Placeholder 4"/>
+          <p:cNvPr id="595166535" name="Footer Placeholder 4"/>
           <p:cNvSpPr>
             <a:spLocks noGrp="1"/>
           </p:cNvSpPr>
@@ -1491,7 +1657,7 @@
       </p:sp>
       <p:sp>
         <p:nvSpPr>
-          <p:cNvPr id="68357831" name="Slide Number Placeholder 5"/>
+          <p:cNvPr id="1324042479" name="Slide Number Placeholder 5"/>
           <p:cNvSpPr>
             <a:spLocks noGrp="1"/>
           </p:cNvSpPr>
@@ -1542,7 +1708,7 @@
       </p:grpSpPr>
       <p:sp>
         <p:nvSpPr>
-          <p:cNvPr id="1681305097" name="Title 1"/>
+          <p:cNvPr id="536163877" name="Title 1"/>
           <p:cNvSpPr>
             <a:spLocks noGrp="1"/>
           </p:cNvSpPr>
@@ -1568,7 +1734,7 @@
       </p:sp>
       <p:sp>
         <p:nvSpPr>
-          <p:cNvPr id="1375288972" name="Vertical Text Placeholder 2"/>
+          <p:cNvPr id="2079682371" name="Vertical Text Placeholder 2"/>
           <p:cNvSpPr>
             <a:spLocks noGrp="1"/>
           </p:cNvSpPr>
@@ -1634,7 +1800,7 @@
       </p:sp>
       <p:sp>
         <p:nvSpPr>
-          <p:cNvPr id="869240157" name="Date Placeholder 3"/>
+          <p:cNvPr id="1447546631" name="Date Placeholder 3"/>
           <p:cNvSpPr>
             <a:spLocks noGrp="1"/>
           </p:cNvSpPr>
@@ -1660,7 +1826,7 @@
       </p:sp>
       <p:sp>
         <p:nvSpPr>
-          <p:cNvPr id="1922341874" name="Footer Placeholder 4"/>
+          <p:cNvPr id="1195860950" name="Footer Placeholder 4"/>
           <p:cNvSpPr>
             <a:spLocks noGrp="1"/>
           </p:cNvSpPr>
@@ -1682,7 +1848,7 @@
       </p:sp>
       <p:sp>
         <p:nvSpPr>
-          <p:cNvPr id="1998891822" name="Slide Number Placeholder 5"/>
+          <p:cNvPr id="680452767" name="Slide Number Placeholder 5"/>
           <p:cNvSpPr>
             <a:spLocks noGrp="1"/>
           </p:cNvSpPr>
@@ -1733,7 +1899,7 @@
       </p:grpSpPr>
       <p:sp>
         <p:nvSpPr>
-          <p:cNvPr id="111806914" name="Vertical Title 1"/>
+          <p:cNvPr id="1321327699" name="Vertical Title 1"/>
           <p:cNvSpPr>
             <a:spLocks noGrp="1"/>
           </p:cNvSpPr>
@@ -1764,7 +1930,7 @@
       </p:sp>
       <p:sp>
         <p:nvSpPr>
-          <p:cNvPr id="664083731" name="Vertical Text Placeholder 2"/>
+          <p:cNvPr id="1065860603" name="Vertical Text Placeholder 2"/>
           <p:cNvSpPr>
             <a:spLocks noGrp="1"/>
           </p:cNvSpPr>
@@ -1835,7 +2001,7 @@
       </p:sp>
       <p:sp>
         <p:nvSpPr>
-          <p:cNvPr id="1608755291" name="Date Placeholder 3"/>
+          <p:cNvPr id="1895773991" name="Date Placeholder 3"/>
           <p:cNvSpPr>
             <a:spLocks noGrp="1"/>
           </p:cNvSpPr>
@@ -1861,7 +2027,7 @@
       </p:sp>
       <p:sp>
         <p:nvSpPr>
-          <p:cNvPr id="658265691" name="Footer Placeholder 4"/>
+          <p:cNvPr id="239181887" name="Footer Placeholder 4"/>
           <p:cNvSpPr>
             <a:spLocks noGrp="1"/>
           </p:cNvSpPr>
@@ -1883,7 +2049,7 @@
       </p:sp>
       <p:sp>
         <p:nvSpPr>
-          <p:cNvPr id="853737280" name="Slide Number Placeholder 5"/>
+          <p:cNvPr id="1365930277" name="Slide Number Placeholder 5"/>
           <p:cNvSpPr>
             <a:spLocks noGrp="1"/>
           </p:cNvSpPr>
@@ -1934,7 +2100,7 @@
       </p:grpSpPr>
       <p:sp>
         <p:nvSpPr>
-          <p:cNvPr id="1742620335" name="Title 1"/>
+          <p:cNvPr id="390812882" name="Title 1"/>
           <p:cNvSpPr>
             <a:spLocks noGrp="1"/>
           </p:cNvSpPr>
@@ -1960,7 +2126,7 @@
       </p:sp>
       <p:sp>
         <p:nvSpPr>
-          <p:cNvPr id="992235721" name="Content Placeholder 2"/>
+          <p:cNvPr id="1396161670" name="Content Placeholder 2"/>
           <p:cNvSpPr>
             <a:spLocks noGrp="1"/>
           </p:cNvSpPr>
@@ -2026,7 +2192,7 @@
       </p:sp>
       <p:sp>
         <p:nvSpPr>
-          <p:cNvPr id="123897417" name="Date Placeholder 3"/>
+          <p:cNvPr id="1289510200" name="Date Placeholder 3"/>
           <p:cNvSpPr>
             <a:spLocks noGrp="1"/>
           </p:cNvSpPr>
@@ -2052,7 +2218,7 @@
       </p:sp>
       <p:sp>
         <p:nvSpPr>
-          <p:cNvPr id="155843789" name="Footer Placeholder 4"/>
+          <p:cNvPr id="119195784" name="Footer Placeholder 4"/>
           <p:cNvSpPr>
             <a:spLocks noGrp="1"/>
           </p:cNvSpPr>
@@ -2074,7 +2240,7 @@
       </p:sp>
       <p:sp>
         <p:nvSpPr>
-          <p:cNvPr id="1619586558" name="Slide Number Placeholder 5"/>
+          <p:cNvPr id="2146351393" name="Slide Number Placeholder 5"/>
           <p:cNvSpPr>
             <a:spLocks noGrp="1"/>
           </p:cNvSpPr>
@@ -2125,7 +2291,7 @@
       </p:grpSpPr>
       <p:sp>
         <p:nvSpPr>
-          <p:cNvPr id="1703747478" name="Title 1"/>
+          <p:cNvPr id="1939571284" name="Title 1"/>
           <p:cNvSpPr>
             <a:spLocks noGrp="1"/>
           </p:cNvSpPr>
@@ -2160,7 +2326,7 @@
       </p:sp>
       <p:sp>
         <p:nvSpPr>
-          <p:cNvPr id="1901637899" name="Text Placeholder 2"/>
+          <p:cNvPr id="1116176686" name="Text Placeholder 2"/>
           <p:cNvSpPr>
             <a:spLocks noGrp="1"/>
           </p:cNvSpPr>
@@ -2282,7 +2448,7 @@
       </p:sp>
       <p:sp>
         <p:nvSpPr>
-          <p:cNvPr id="1690719216" name="Date Placeholder 3"/>
+          <p:cNvPr id="1958558461" name="Date Placeholder 3"/>
           <p:cNvSpPr>
             <a:spLocks noGrp="1"/>
           </p:cNvSpPr>
@@ -2308,7 +2474,7 @@
       </p:sp>
       <p:sp>
         <p:nvSpPr>
-          <p:cNvPr id="590515606" name="Footer Placeholder 4"/>
+          <p:cNvPr id="1130379065" name="Footer Placeholder 4"/>
           <p:cNvSpPr>
             <a:spLocks noGrp="1"/>
           </p:cNvSpPr>
@@ -2330,7 +2496,7 @@
       </p:sp>
       <p:sp>
         <p:nvSpPr>
-          <p:cNvPr id="208525" name="Slide Number Placeholder 5"/>
+          <p:cNvPr id="67667494" name="Slide Number Placeholder 5"/>
           <p:cNvSpPr>
             <a:spLocks noGrp="1"/>
           </p:cNvSpPr>
@@ -2381,7 +2547,7 @@
       </p:grpSpPr>
       <p:sp>
         <p:nvSpPr>
-          <p:cNvPr id="637575568" name="Title 1"/>
+          <p:cNvPr id="1542729331" name="Title 1"/>
           <p:cNvSpPr>
             <a:spLocks noGrp="1"/>
           </p:cNvSpPr>
@@ -2407,7 +2573,7 @@
       </p:sp>
       <p:sp>
         <p:nvSpPr>
-          <p:cNvPr id="1725687526" name="Content Placeholder 2"/>
+          <p:cNvPr id="1162921023" name="Content Placeholder 2"/>
           <p:cNvSpPr>
             <a:spLocks noGrp="1"/>
           </p:cNvSpPr>
@@ -2478,7 +2644,7 @@
       </p:sp>
       <p:sp>
         <p:nvSpPr>
-          <p:cNvPr id="1503184693" name="Content Placeholder 3"/>
+          <p:cNvPr id="1707074088" name="Content Placeholder 3"/>
           <p:cNvSpPr>
             <a:spLocks noGrp="1"/>
           </p:cNvSpPr>
@@ -2549,7 +2715,7 @@
       </p:sp>
       <p:sp>
         <p:nvSpPr>
-          <p:cNvPr id="1888942424" name="Date Placeholder 4"/>
+          <p:cNvPr id="652190244" name="Date Placeholder 4"/>
           <p:cNvSpPr>
             <a:spLocks noGrp="1"/>
           </p:cNvSpPr>
@@ -2575,7 +2741,7 @@
       </p:sp>
       <p:sp>
         <p:nvSpPr>
-          <p:cNvPr id="764865310" name="Footer Placeholder 5"/>
+          <p:cNvPr id="1864928478" name="Footer Placeholder 5"/>
           <p:cNvSpPr>
             <a:spLocks noGrp="1"/>
           </p:cNvSpPr>
@@ -2597,7 +2763,7 @@
       </p:sp>
       <p:sp>
         <p:nvSpPr>
-          <p:cNvPr id="144005833" name="Slide Number Placeholder 6"/>
+          <p:cNvPr id="711552083" name="Slide Number Placeholder 6"/>
           <p:cNvSpPr>
             <a:spLocks noGrp="1"/>
           </p:cNvSpPr>
@@ -2648,7 +2814,7 @@
       </p:grpSpPr>
       <p:sp>
         <p:nvSpPr>
-          <p:cNvPr id="96483415" name="Title 1"/>
+          <p:cNvPr id="1332896087" name="Title 1"/>
           <p:cNvSpPr>
             <a:spLocks noGrp="1"/>
           </p:cNvSpPr>
@@ -2679,7 +2845,7 @@
       </p:sp>
       <p:sp>
         <p:nvSpPr>
-          <p:cNvPr id="1797133672" name="Text Placeholder 2"/>
+          <p:cNvPr id="1514069014" name="Text Placeholder 2"/>
           <p:cNvSpPr>
             <a:spLocks noGrp="1"/>
           </p:cNvSpPr>
@@ -2747,7 +2913,7 @@
       </p:sp>
       <p:sp>
         <p:nvSpPr>
-          <p:cNvPr id="635049276" name="Content Placeholder 3"/>
+          <p:cNvPr id="1940779519" name="Content Placeholder 3"/>
           <p:cNvSpPr>
             <a:spLocks noGrp="1"/>
           </p:cNvSpPr>
@@ -2818,7 +2984,7 @@
       </p:sp>
       <p:sp>
         <p:nvSpPr>
-          <p:cNvPr id="1074716425" name="Text Placeholder 4"/>
+          <p:cNvPr id="715577071" name="Text Placeholder 4"/>
           <p:cNvSpPr>
             <a:spLocks noGrp="1"/>
           </p:cNvSpPr>
@@ -2886,7 +3052,7 @@
       </p:sp>
       <p:sp>
         <p:nvSpPr>
-          <p:cNvPr id="1538756869" name="Content Placeholder 5"/>
+          <p:cNvPr id="1478364154" name="Content Placeholder 5"/>
           <p:cNvSpPr>
             <a:spLocks noGrp="1"/>
           </p:cNvSpPr>
@@ -2957,7 +3123,7 @@
       </p:sp>
       <p:sp>
         <p:nvSpPr>
-          <p:cNvPr id="1493866728" name="Date Placeholder 6"/>
+          <p:cNvPr id="1095717789" name="Date Placeholder 6"/>
           <p:cNvSpPr>
             <a:spLocks noGrp="1"/>
           </p:cNvSpPr>
@@ -2983,7 +3149,7 @@
       </p:sp>
       <p:sp>
         <p:nvSpPr>
-          <p:cNvPr id="302100937" name="Footer Placeholder 7"/>
+          <p:cNvPr id="214101417" name="Footer Placeholder 7"/>
           <p:cNvSpPr>
             <a:spLocks noGrp="1"/>
           </p:cNvSpPr>
@@ -3005,7 +3171,7 @@
       </p:sp>
       <p:sp>
         <p:nvSpPr>
-          <p:cNvPr id="1597646723" name="Slide Number Placeholder 8"/>
+          <p:cNvPr id="722106466" name="Slide Number Placeholder 8"/>
           <p:cNvSpPr>
             <a:spLocks noGrp="1"/>
           </p:cNvSpPr>
@@ -3056,7 +3222,7 @@
       </p:grpSpPr>
       <p:sp>
         <p:nvSpPr>
-          <p:cNvPr id="75058514" name="Title 1"/>
+          <p:cNvPr id="1761770386" name="Title 1"/>
           <p:cNvSpPr>
             <a:spLocks noGrp="1"/>
           </p:cNvSpPr>
@@ -3082,7 +3248,7 @@
       </p:sp>
       <p:sp>
         <p:nvSpPr>
-          <p:cNvPr id="495803048" name="Date Placeholder 2"/>
+          <p:cNvPr id="531925394" name="Date Placeholder 2"/>
           <p:cNvSpPr>
             <a:spLocks noGrp="1"/>
           </p:cNvSpPr>
@@ -3108,7 +3274,7 @@
       </p:sp>
       <p:sp>
         <p:nvSpPr>
-          <p:cNvPr id="1928193525" name="Footer Placeholder 3"/>
+          <p:cNvPr id="371587957" name="Footer Placeholder 3"/>
           <p:cNvSpPr>
             <a:spLocks noGrp="1"/>
           </p:cNvSpPr>
@@ -3130,7 +3296,7 @@
       </p:sp>
       <p:sp>
         <p:nvSpPr>
-          <p:cNvPr id="1981945233" name="Slide Number Placeholder 4"/>
+          <p:cNvPr id="2012493523" name="Slide Number Placeholder 4"/>
           <p:cNvSpPr>
             <a:spLocks noGrp="1"/>
           </p:cNvSpPr>
@@ -3181,7 +3347,7 @@
       </p:grpSpPr>
       <p:sp>
         <p:nvSpPr>
-          <p:cNvPr id="1121000415" name="Date Placeholder 1"/>
+          <p:cNvPr id="1569382882" name="Date Placeholder 1"/>
           <p:cNvSpPr>
             <a:spLocks noGrp="1"/>
           </p:cNvSpPr>
@@ -3207,7 +3373,7 @@
       </p:sp>
       <p:sp>
         <p:nvSpPr>
-          <p:cNvPr id="90799012" name="Footer Placeholder 2"/>
+          <p:cNvPr id="274773372" name="Footer Placeholder 2"/>
           <p:cNvSpPr>
             <a:spLocks noGrp="1"/>
           </p:cNvSpPr>
@@ -3229,7 +3395,7 @@
       </p:sp>
       <p:sp>
         <p:nvSpPr>
-          <p:cNvPr id="423324782" name="Slide Number Placeholder 3"/>
+          <p:cNvPr id="2087599436" name="Slide Number Placeholder 3"/>
           <p:cNvSpPr>
             <a:spLocks noGrp="1"/>
           </p:cNvSpPr>
@@ -3280,7 +3446,7 @@
       </p:grpSpPr>
       <p:sp>
         <p:nvSpPr>
-          <p:cNvPr id="1721604744" name="Title 1"/>
+          <p:cNvPr id="2056901500" name="Title 1"/>
           <p:cNvSpPr>
             <a:spLocks noGrp="1"/>
           </p:cNvSpPr>
@@ -3315,7 +3481,7 @@
       </p:sp>
       <p:sp>
         <p:nvSpPr>
-          <p:cNvPr id="782496712" name="Content Placeholder 2"/>
+          <p:cNvPr id="1339944510" name="Content Placeholder 2"/>
           <p:cNvSpPr>
             <a:spLocks noGrp="1"/>
           </p:cNvSpPr>
@@ -3414,7 +3580,7 @@
       </p:sp>
       <p:sp>
         <p:nvSpPr>
-          <p:cNvPr id="571937955" name="Text Placeholder 3"/>
+          <p:cNvPr id="1630217740" name="Text Placeholder 3"/>
           <p:cNvSpPr>
             <a:spLocks noGrp="1"/>
           </p:cNvSpPr>
@@ -3482,7 +3648,7 @@
       </p:sp>
       <p:sp>
         <p:nvSpPr>
-          <p:cNvPr id="203412604" name="Date Placeholder 4"/>
+          <p:cNvPr id="1311168013" name="Date Placeholder 4"/>
           <p:cNvSpPr>
             <a:spLocks noGrp="1"/>
           </p:cNvSpPr>
@@ -3508,7 +3674,7 @@
       </p:sp>
       <p:sp>
         <p:nvSpPr>
-          <p:cNvPr id="1504860924" name="Footer Placeholder 5"/>
+          <p:cNvPr id="490649479" name="Footer Placeholder 5"/>
           <p:cNvSpPr>
             <a:spLocks noGrp="1"/>
           </p:cNvSpPr>
@@ -3530,7 +3696,7 @@
       </p:sp>
       <p:sp>
         <p:nvSpPr>
-          <p:cNvPr id="286562431" name="Slide Number Placeholder 6"/>
+          <p:cNvPr id="919167032" name="Slide Number Placeholder 6"/>
           <p:cNvSpPr>
             <a:spLocks noGrp="1"/>
           </p:cNvSpPr>
@@ -3581,7 +3747,7 @@
       </p:grpSpPr>
       <p:sp>
         <p:nvSpPr>
-          <p:cNvPr id="860961632" name="Title 1"/>
+          <p:cNvPr id="217214324" name="Title 1"/>
           <p:cNvSpPr>
             <a:spLocks noGrp="1"/>
           </p:cNvSpPr>
@@ -3616,7 +3782,7 @@
       </p:sp>
       <p:sp>
         <p:nvSpPr>
-          <p:cNvPr id="234011035" name="Picture Placeholder 2"/>
+          <p:cNvPr id="1139418197" name="Picture Placeholder 2"/>
           <p:cNvSpPr>
             <a:spLocks noChangeAspect="1" noGrp="1"/>
           </p:cNvSpPr>
@@ -3684,7 +3850,7 @@
       </p:sp>
       <p:sp>
         <p:nvSpPr>
-          <p:cNvPr id="482970947" name="Text Placeholder 3"/>
+          <p:cNvPr id="2009224000" name="Text Placeholder 3"/>
           <p:cNvSpPr>
             <a:spLocks noGrp="1"/>
           </p:cNvSpPr>
@@ -3752,7 +3918,7 @@
       </p:sp>
       <p:sp>
         <p:nvSpPr>
-          <p:cNvPr id="1863024793" name="Date Placeholder 4"/>
+          <p:cNvPr id="298885031" name="Date Placeholder 4"/>
           <p:cNvSpPr>
             <a:spLocks noGrp="1"/>
           </p:cNvSpPr>
@@ -3778,7 +3944,7 @@
       </p:sp>
       <p:sp>
         <p:nvSpPr>
-          <p:cNvPr id="1450753892" name="Footer Placeholder 5"/>
+          <p:cNvPr id="136849310" name="Footer Placeholder 5"/>
           <p:cNvSpPr>
             <a:spLocks noGrp="1"/>
           </p:cNvSpPr>
@@ -3800,7 +3966,7 @@
       </p:sp>
       <p:sp>
         <p:nvSpPr>
-          <p:cNvPr id="1661633539" name="Slide Number Placeholder 6"/>
+          <p:cNvPr id="2015139935" name="Slide Number Placeholder 6"/>
           <p:cNvSpPr>
             <a:spLocks noGrp="1"/>
           </p:cNvSpPr>
@@ -3856,7 +4022,7 @@
       </p:grpSpPr>
       <p:sp>
         <p:nvSpPr>
-          <p:cNvPr id="442409149" name="Title Placeholder 1"/>
+          <p:cNvPr id="1900842683" name="Title Placeholder 1"/>
           <p:cNvSpPr>
             <a:spLocks noGrp="1"/>
           </p:cNvSpPr>
@@ -3892,7 +4058,7 @@
       </p:sp>
       <p:sp>
         <p:nvSpPr>
-          <p:cNvPr id="1424875933" name="Text Placeholder 2"/>
+          <p:cNvPr id="85974783" name="Text Placeholder 2"/>
           <p:cNvSpPr>
             <a:spLocks noGrp="1"/>
           </p:cNvSpPr>
@@ -3968,7 +4134,7 @@
       </p:sp>
       <p:sp>
         <p:nvSpPr>
-          <p:cNvPr id="212067276" name="Date Placeholder 3"/>
+          <p:cNvPr id="1345523823" name="Date Placeholder 3"/>
           <p:cNvSpPr>
             <a:spLocks noGrp="1"/>
           </p:cNvSpPr>
@@ -4012,7 +4178,7 @@
       </p:sp>
       <p:sp>
         <p:nvSpPr>
-          <p:cNvPr id="1771235057" name="Footer Placeholder 4"/>
+          <p:cNvPr id="2045364806" name="Footer Placeholder 4"/>
           <p:cNvSpPr>
             <a:spLocks noGrp="1"/>
           </p:cNvSpPr>
@@ -4052,7 +4218,7 @@
       </p:sp>
       <p:sp>
         <p:nvSpPr>
-          <p:cNvPr id="1588974798" name="Slide Number Placeholder 5"/>
+          <p:cNvPr id="1216478556" name="Slide Number Placeholder 5"/>
           <p:cNvSpPr>
             <a:spLocks noGrp="1"/>
           </p:cNvSpPr>
@@ -4412,7 +4578,7 @@
       </p:grpSpPr>
       <p:sp>
         <p:nvSpPr>
-          <p:cNvPr id="974337225" name="Title 1"/>
+          <p:cNvPr id="188953043" name="Title 1"/>
           <p:cNvSpPr>
             <a:spLocks noGrp="1"/>
           </p:cNvSpPr>
@@ -4456,7 +4622,7 @@
       </p:sp>
       <p:sp>
         <p:nvSpPr>
-          <p:cNvPr id="183978926" name="Subtitle 2"/>
+          <p:cNvPr id="1650414891" name="Subtitle 2"/>
           <p:cNvSpPr>
             <a:spLocks noGrp="1"/>
           </p:cNvSpPr>
@@ -4602,7 +4768,459 @@
       </p:grpSpPr>
       <p:sp>
         <p:nvSpPr>
-          <p:cNvPr id="277392399" name="Title 1"/>
+          <p:cNvPr id="1225140349" name="Title 1"/>
+          <p:cNvSpPr>
+            <a:spLocks noGrp="1"/>
+          </p:cNvSpPr>
+          <p:nvPr>
+            <p:ph type="title"/>
+          </p:nvPr>
+        </p:nvSpPr>
+        <p:spPr bwMode="auto"/>
+        <p:txBody>
+          <a:bodyPr/>
+          <a:lstStyle/>
+          <a:p>
+            <a:pPr>
+              <a:defRPr/>
+            </a:pPr>
+            <a:r>
+              <a:rPr lang="en-IN" sz="3600" b="1">
+                <a:latin typeface="Times New Roman"/>
+                <a:ea typeface="Times New Roman"/>
+                <a:cs typeface="Times New Roman"/>
+              </a:rPr>
+              <a:t>Advatages</a:t>
+            </a:r>
+            <a:endParaRPr>
+              <a:latin typeface="Times New Roman"/>
+              <a:cs typeface="Times New Roman"/>
+            </a:endParaRPr>
+          </a:p>
+        </p:txBody>
+      </p:sp>
+      <p:sp>
+        <p:nvSpPr>
+          <p:cNvPr id="126759996" name="Content Placeholder 2"/>
+          <p:cNvSpPr>
+            <a:spLocks noGrp="1"/>
+          </p:cNvSpPr>
+          <p:nvPr>
+            <p:ph idx="1"/>
+          </p:nvPr>
+        </p:nvSpPr>
+        <p:spPr bwMode="auto"/>
+        <p:txBody>
+          <a:bodyPr/>
+          <a:lstStyle/>
+          <a:p>
+            <a:pPr>
+              <a:defRPr/>
+            </a:pPr>
+            <a:r>
+              <a:rPr sz="2800" b="1" i="0" u="none">
+                <a:solidFill>
+                  <a:srgbClr val="000000"/>
+                </a:solidFill>
+                <a:latin typeface="Times New Roman"/>
+                <a:ea typeface="Times New Roman"/>
+                <a:cs typeface="Times New Roman"/>
+              </a:rPr>
+              <a:t>Simple architecture</a:t>
+            </a:r>
+            <a:br>
+              <a:rPr sz="2800" b="1" i="0" u="none">
+                <a:solidFill>
+                  <a:srgbClr val="000000"/>
+                </a:solidFill>
+                <a:latin typeface="Times New Roman"/>
+                <a:ea typeface="Times New Roman"/>
+                <a:cs typeface="Times New Roman"/>
+              </a:rPr>
+            </a:br>
+            <a:r>
+              <a:rPr sz="2800" b="0" i="0" u="none">
+                <a:solidFill>
+                  <a:srgbClr val="000000"/>
+                </a:solidFill>
+                <a:latin typeface="Times New Roman"/>
+                <a:ea typeface="Times New Roman"/>
+                <a:cs typeface="Times New Roman"/>
+              </a:rPr>
+              <a:t> Easy to design, implement, and debug. </a:t>
+            </a:r>
+            <a:endParaRPr sz="2800"/>
+          </a:p>
+          <a:p>
+            <a:pPr>
+              <a:defRPr/>
+            </a:pPr>
+            <a:r>
+              <a:rPr sz="2800" b="1" i="0" u="none">
+                <a:solidFill>
+                  <a:srgbClr val="000000"/>
+                </a:solidFill>
+                <a:latin typeface="Times New Roman"/>
+                <a:ea typeface="Times New Roman"/>
+                <a:cs typeface="Times New Roman"/>
+              </a:rPr>
+              <a:t>Open standard</a:t>
+            </a:r>
+            <a:br>
+              <a:rPr sz="2800" b="1" i="0" u="none">
+                <a:solidFill>
+                  <a:srgbClr val="000000"/>
+                </a:solidFill>
+                <a:latin typeface="Times New Roman"/>
+                <a:ea typeface="Times New Roman"/>
+                <a:cs typeface="Times New Roman"/>
+              </a:rPr>
+            </a:br>
+            <a:r>
+              <a:rPr sz="2800" b="0" i="0" u="none">
+                <a:solidFill>
+                  <a:srgbClr val="000000"/>
+                </a:solidFill>
+                <a:latin typeface="Times New Roman"/>
+                <a:ea typeface="Times New Roman"/>
+                <a:cs typeface="Times New Roman"/>
+              </a:rPr>
+              <a:t> No licensing or royalty issues (unlike </a:t>
+            </a:r>
+            <a:r>
+              <a:rPr sz="2800" b="0" i="0" u="none">
+                <a:solidFill>
+                  <a:srgbClr val="000000"/>
+                </a:solidFill>
+                <a:latin typeface="Times New Roman"/>
+                <a:ea typeface="Times New Roman"/>
+                <a:cs typeface="Times New Roman"/>
+              </a:rPr>
+              <a:t>ARM Holdings</a:t>
+            </a:r>
+            <a:r>
+              <a:rPr sz="2800" b="0" i="0" u="none">
+                <a:solidFill>
+                  <a:srgbClr val="000000"/>
+                </a:solidFill>
+                <a:latin typeface="Times New Roman"/>
+                <a:ea typeface="Times New Roman"/>
+                <a:cs typeface="Times New Roman"/>
+              </a:rPr>
+              <a:t> AMBA protocols). </a:t>
+            </a:r>
+            <a:endParaRPr sz="2800"/>
+          </a:p>
+          <a:p>
+            <a:pPr>
+              <a:defRPr/>
+            </a:pPr>
+            <a:r>
+              <a:rPr sz="2800" b="1" i="0" u="none">
+                <a:solidFill>
+                  <a:srgbClr val="000000"/>
+                </a:solidFill>
+                <a:latin typeface="Times New Roman"/>
+                <a:ea typeface="Times New Roman"/>
+                <a:cs typeface="Times New Roman"/>
+              </a:rPr>
+              <a:t>Easy IP integration</a:t>
+            </a:r>
+            <a:br>
+              <a:rPr sz="2800" b="1" i="0" u="none">
+                <a:solidFill>
+                  <a:srgbClr val="000000"/>
+                </a:solidFill>
+                <a:latin typeface="Times New Roman"/>
+                <a:ea typeface="Times New Roman"/>
+                <a:cs typeface="Times New Roman"/>
+              </a:rPr>
+            </a:br>
+            <a:r>
+              <a:rPr sz="2800" b="0" i="0" u="none">
+                <a:solidFill>
+                  <a:srgbClr val="000000"/>
+                </a:solidFill>
+                <a:latin typeface="Times New Roman"/>
+                <a:ea typeface="Times New Roman"/>
+                <a:cs typeface="Times New Roman"/>
+              </a:rPr>
+              <a:t> Standard interface allows quick connection of modules. </a:t>
+            </a:r>
+            <a:endParaRPr sz="2800"/>
+          </a:p>
+          <a:p>
+            <a:pPr>
+              <a:defRPr/>
+            </a:pPr>
+            <a:r>
+              <a:rPr sz="2800" b="1" i="0" u="none">
+                <a:solidFill>
+                  <a:srgbClr val="000000"/>
+                </a:solidFill>
+                <a:latin typeface="Times New Roman"/>
+                <a:ea typeface="Times New Roman"/>
+                <a:cs typeface="Times New Roman"/>
+              </a:rPr>
+              <a:t>Low overhead</a:t>
+            </a:r>
+            <a:br>
+              <a:rPr sz="2800" b="1" i="0" u="none">
+                <a:solidFill>
+                  <a:srgbClr val="000000"/>
+                </a:solidFill>
+                <a:latin typeface="Times New Roman"/>
+                <a:ea typeface="Times New Roman"/>
+                <a:cs typeface="Times New Roman"/>
+              </a:rPr>
+            </a:br>
+            <a:r>
+              <a:rPr sz="2800" b="0" i="0" u="none">
+                <a:solidFill>
+                  <a:srgbClr val="000000"/>
+                </a:solidFill>
+                <a:latin typeface="Times New Roman"/>
+                <a:ea typeface="Times New Roman"/>
+                <a:cs typeface="Times New Roman"/>
+              </a:rPr>
+              <a:t> Minimal control logic → smaller area and power usage.</a:t>
+            </a:r>
+            <a:endParaRPr sz="2800"/>
+          </a:p>
+        </p:txBody>
+      </p:sp>
+    </p:spTree>
+  </p:cSld>
+  <p:clrMapOvr>
+    <a:masterClrMapping/>
+  </p:clrMapOvr>
+  <mc:AlternateContent xmlns:mc="http://schemas.openxmlformats.org/markup-compatibility/2006">
+    <mc:Choice xmlns:p159="http://schemas.microsoft.com/office/powerpoint/2015/09/main" xmlns:p14="http://schemas.microsoft.com/office/powerpoint/2010/main" Requires="p159">
+      <p:transition p14:dur="2000" advClick="1"/>
+    </mc:Choice>
+    <mc:Fallback>
+      <p:transition advClick="1"/>
+    </mc:Fallback>
+  </mc:AlternateContent>
+</p:sld>
+</file>
+
+<file path=ppt/slides/slide11.xml><?xml version="1.0" encoding="utf-8"?>
+<p:sld xmlns:a="http://schemas.openxmlformats.org/drawingml/2006/main" xmlns:r="http://schemas.openxmlformats.org/officeDocument/2006/relationships" xmlns:p="http://schemas.openxmlformats.org/presentationml/2006/main" xmlns:m="http://schemas.openxmlformats.org/officeDocument/2006/math" xmlns:w="http://schemas.openxmlformats.org/wordprocessingml/2006/main" xmlns:mc="http://schemas.openxmlformats.org/markup-compatibility/2006" showMasterPhAnim="0" showMasterSp="1" show="1">
+  <p:cSld name="">
+    <p:spTree>
+      <p:nvGrpSpPr>
+        <p:cNvPr id="1" name=""/>
+        <p:cNvGrpSpPr/>
+        <p:nvPr/>
+      </p:nvGrpSpPr>
+      <p:grpSpPr bwMode="auto">
+        <a:xfrm>
+          <a:off x="0" y="0"/>
+          <a:ext cx="0" cy="0"/>
+          <a:chOff x="0" y="0"/>
+          <a:chExt cx="0" cy="0"/>
+        </a:xfrm>
+      </p:grpSpPr>
+      <p:sp>
+        <p:nvSpPr>
+          <p:cNvPr id="2106220349" name="Title 1"/>
+          <p:cNvSpPr>
+            <a:spLocks noGrp="1"/>
+          </p:cNvSpPr>
+          <p:nvPr>
+            <p:ph type="title"/>
+          </p:nvPr>
+        </p:nvSpPr>
+        <p:spPr bwMode="auto"/>
+        <p:txBody>
+          <a:bodyPr/>
+          <a:lstStyle/>
+          <a:p>
+            <a:pPr>
+              <a:defRPr/>
+            </a:pPr>
+            <a:r>
+              <a:rPr lang="en-IN" sz="3600" b="1">
+                <a:latin typeface="Times New Roman"/>
+                <a:ea typeface="Times New Roman"/>
+                <a:cs typeface="Times New Roman"/>
+              </a:rPr>
+              <a:t>Disadvantages</a:t>
+            </a:r>
+            <a:endParaRPr sz="3600" b="1">
+              <a:latin typeface="Times New Roman"/>
+              <a:cs typeface="Times New Roman"/>
+            </a:endParaRPr>
+          </a:p>
+        </p:txBody>
+      </p:sp>
+      <p:sp>
+        <p:nvSpPr>
+          <p:cNvPr id="1282132973" name="Content Placeholder 2"/>
+          <p:cNvSpPr>
+            <a:spLocks noGrp="1"/>
+          </p:cNvSpPr>
+          <p:nvPr>
+            <p:ph idx="1"/>
+          </p:nvPr>
+        </p:nvSpPr>
+        <p:spPr bwMode="auto"/>
+        <p:txBody>
+          <a:bodyPr/>
+          <a:lstStyle/>
+          <a:p>
+            <a:pPr>
+              <a:defRPr/>
+            </a:pPr>
+            <a:r>
+              <a:rPr sz="2800" b="1" i="0" u="none">
+                <a:solidFill>
+                  <a:srgbClr val="000000"/>
+                </a:solidFill>
+                <a:latin typeface="Times New Roman"/>
+                <a:ea typeface="Times New Roman"/>
+                <a:cs typeface="Times New Roman"/>
+              </a:rPr>
+              <a:t>Lower performance</a:t>
+            </a:r>
+            <a:br>
+              <a:rPr sz="2800" b="1" i="0" u="none">
+                <a:solidFill>
+                  <a:srgbClr val="000000"/>
+                </a:solidFill>
+                <a:latin typeface="Times New Roman"/>
+                <a:ea typeface="Times New Roman"/>
+                <a:cs typeface="Times New Roman"/>
+              </a:rPr>
+            </a:br>
+            <a:r>
+              <a:rPr sz="2800" b="0" i="0" u="none">
+                <a:solidFill>
+                  <a:srgbClr val="000000"/>
+                </a:solidFill>
+                <a:latin typeface="Times New Roman"/>
+                <a:ea typeface="Times New Roman"/>
+                <a:cs typeface="Times New Roman"/>
+              </a:rPr>
+              <a:t> No advanced features like burst transfers or pipelining (compared to AXI). </a:t>
+            </a:r>
+            <a:endParaRPr sz="2800"/>
+          </a:p>
+          <a:p>
+            <a:pPr>
+              <a:defRPr/>
+            </a:pPr>
+            <a:r>
+              <a:rPr sz="2800" b="1" i="0" u="none">
+                <a:solidFill>
+                  <a:srgbClr val="000000"/>
+                </a:solidFill>
+                <a:latin typeface="Times New Roman"/>
+                <a:ea typeface="Times New Roman"/>
+                <a:cs typeface="Times New Roman"/>
+              </a:rPr>
+              <a:t>Limited scalability</a:t>
+            </a:r>
+            <a:br>
+              <a:rPr sz="2800" b="1" i="0" u="none">
+                <a:solidFill>
+                  <a:srgbClr val="000000"/>
+                </a:solidFill>
+                <a:latin typeface="Times New Roman"/>
+                <a:ea typeface="Times New Roman"/>
+                <a:cs typeface="Times New Roman"/>
+              </a:rPr>
+            </a:br>
+            <a:r>
+              <a:rPr sz="2800" b="0" i="0" u="none">
+                <a:solidFill>
+                  <a:srgbClr val="000000"/>
+                </a:solidFill>
+                <a:latin typeface="Times New Roman"/>
+                <a:ea typeface="Times New Roman"/>
+                <a:cs typeface="Times New Roman"/>
+              </a:rPr>
+              <a:t> Not ideal for large, complex SoCs. </a:t>
+            </a:r>
+            <a:endParaRPr sz="2800"/>
+          </a:p>
+          <a:p>
+            <a:pPr>
+              <a:defRPr/>
+            </a:pPr>
+            <a:r>
+              <a:rPr sz="2800" b="1" i="0" u="none">
+                <a:solidFill>
+                  <a:srgbClr val="000000"/>
+                </a:solidFill>
+                <a:latin typeface="Times New Roman"/>
+                <a:ea typeface="Times New Roman"/>
+                <a:cs typeface="Times New Roman"/>
+              </a:rPr>
+              <a:t>Less industry adoption</a:t>
+            </a:r>
+            <a:br>
+              <a:rPr sz="2800" b="1" i="0" u="none">
+                <a:solidFill>
+                  <a:srgbClr val="000000"/>
+                </a:solidFill>
+                <a:latin typeface="Times New Roman"/>
+                <a:ea typeface="Times New Roman"/>
+                <a:cs typeface="Times New Roman"/>
+              </a:rPr>
+            </a:br>
+            <a:r>
+              <a:rPr sz="2800" b="0" i="0" u="none">
+                <a:solidFill>
+                  <a:srgbClr val="000000"/>
+                </a:solidFill>
+                <a:latin typeface="Times New Roman"/>
+                <a:ea typeface="Times New Roman"/>
+                <a:cs typeface="Times New Roman"/>
+              </a:rPr>
+              <a:t> Fewer commercial IPs compared to AMBA-based systems.</a:t>
+            </a:r>
+            <a:endParaRPr/>
+          </a:p>
+        </p:txBody>
+      </p:sp>
+    </p:spTree>
+  </p:cSld>
+  <p:clrMapOvr>
+    <a:masterClrMapping/>
+  </p:clrMapOvr>
+  <mc:AlternateContent xmlns:mc="http://schemas.openxmlformats.org/markup-compatibility/2006">
+    <mc:Choice xmlns:p159="http://schemas.microsoft.com/office/powerpoint/2015/09/main" xmlns:p14="http://schemas.microsoft.com/office/powerpoint/2010/main" Requires="p159">
+      <p:transition p14:dur="2000" advClick="1"/>
+    </mc:Choice>
+    <mc:Fallback>
+      <p:transition advClick="1"/>
+    </mc:Fallback>
+  </mc:AlternateContent>
+</p:sld>
+</file>
+
+<file path=ppt/slides/slide12.xml><?xml version="1.0" encoding="utf-8"?>
+<p:sld xmlns:a="http://schemas.openxmlformats.org/drawingml/2006/main" xmlns:r="http://schemas.openxmlformats.org/officeDocument/2006/relationships" xmlns:p="http://schemas.openxmlformats.org/presentationml/2006/main" xmlns:m="http://schemas.openxmlformats.org/officeDocument/2006/math" xmlns:w="http://schemas.openxmlformats.org/wordprocessingml/2006/main" xmlns:mc="http://schemas.openxmlformats.org/markup-compatibility/2006" showMasterPhAnim="0" showMasterSp="1" show="1">
+  <p:cSld name="">
+    <p:spTree>
+      <p:nvGrpSpPr>
+        <p:cNvPr id="1" name=""/>
+        <p:cNvGrpSpPr/>
+        <p:nvPr/>
+      </p:nvGrpSpPr>
+      <p:grpSpPr bwMode="auto">
+        <a:xfrm>
+          <a:off x="0" y="0"/>
+          <a:ext cx="0" cy="0"/>
+          <a:chOff x="0" y="0"/>
+          <a:chExt cx="0" cy="0"/>
+        </a:xfrm>
+      </p:grpSpPr>
+      <p:sp>
+        <p:nvSpPr>
+          <p:cNvPr id="626058486" name="Title 1"/>
           <p:cNvSpPr>
             <a:spLocks noGrp="1"/>
           </p:cNvSpPr>
@@ -4635,7 +5253,7 @@
       </p:sp>
       <p:sp>
         <p:nvSpPr>
-          <p:cNvPr id="616050662" name="Content Placeholder 2"/>
+          <p:cNvPr id="1685791191" name="Content Placeholder 2"/>
           <p:cNvSpPr>
             <a:spLocks noGrp="1"/>
           </p:cNvSpPr>
@@ -4801,7 +5419,7 @@
       </p:grpSpPr>
       <p:sp>
         <p:nvSpPr>
-          <p:cNvPr id="378676591" name="Title 1"/>
+          <p:cNvPr id="686109021" name="Title 1"/>
           <p:cNvSpPr>
             <a:spLocks noGrp="1"/>
           </p:cNvSpPr>
@@ -4834,7 +5452,7 @@
       </p:sp>
       <p:sp>
         <p:nvSpPr>
-          <p:cNvPr id="460761902" name="Content Placeholder 2"/>
+          <p:cNvPr id="31466885" name="Content Placeholder 2"/>
           <p:cNvSpPr>
             <a:spLocks noGrp="1"/>
           </p:cNvSpPr>
@@ -4951,7 +5569,7 @@
       </p:grpSpPr>
       <p:sp>
         <p:nvSpPr>
-          <p:cNvPr id="1001437136" name="Title 1"/>
+          <p:cNvPr id="1707113807" name="Title 1"/>
           <p:cNvSpPr>
             <a:spLocks noGrp="1"/>
           </p:cNvSpPr>
@@ -4984,7 +5602,7 @@
       </p:sp>
       <p:sp>
         <p:nvSpPr>
-          <p:cNvPr id="1657027108" name="Content Placeholder 2"/>
+          <p:cNvPr id="301518853" name="Content Placeholder 2"/>
           <p:cNvSpPr>
             <a:spLocks noGrp="1"/>
           </p:cNvSpPr>
@@ -5101,7 +5719,7 @@
       </p:grpSpPr>
       <p:sp>
         <p:nvSpPr>
-          <p:cNvPr id="532685011" name="Title 1"/>
+          <p:cNvPr id="388627865" name="Title 1"/>
           <p:cNvSpPr>
             <a:spLocks noGrp="1"/>
           </p:cNvSpPr>
@@ -5134,7 +5752,7 @@
       </p:sp>
       <p:sp>
         <p:nvSpPr>
-          <p:cNvPr id="1118588983" name="Content Placeholder 2"/>
+          <p:cNvPr id="187023120" name="Content Placeholder 2"/>
           <p:cNvSpPr>
             <a:spLocks noGrp="1"/>
           </p:cNvSpPr>
@@ -5422,7 +6040,7 @@
       </p:grpSpPr>
       <p:sp>
         <p:nvSpPr>
-          <p:cNvPr id="1241645436" name="Content Placeholder 2"/>
+          <p:cNvPr id="674852172" name="Content Placeholder 2"/>
           <p:cNvSpPr>
             <a:spLocks noGrp="1"/>
           </p:cNvSpPr>
@@ -5469,7 +6087,7 @@
       </p:sp>
       <p:graphicFrame>
         <p:nvGraphicFramePr>
-          <p:cNvPr id="529615159" name=""/>
+          <p:cNvPr id="1656370919" name=""/>
           <p:cNvGraphicFramePr>
             <a:graphicFrameLocks xmlns:a="http://schemas.openxmlformats.org/drawingml/2006/main"/>
           </p:cNvGraphicFramePr>
@@ -6343,7 +6961,7 @@
       </p:grpSpPr>
       <p:sp>
         <p:nvSpPr>
-          <p:cNvPr id="1797120260" name="Title 1"/>
+          <p:cNvPr id="1269852699" name="Title 1"/>
           <p:cNvSpPr>
             <a:spLocks noGrp="1"/>
           </p:cNvSpPr>
@@ -6381,7 +6999,7 @@
       </p:sp>
       <p:pic>
         <p:nvPicPr>
-          <p:cNvPr id="1142902158" name=""/>
+          <p:cNvPr id="617661137" name=""/>
           <p:cNvPicPr>
             <a:picLocks noChangeAspect="1"/>
           </p:cNvPicPr>
@@ -6436,7 +7054,7 @@
       </p:grpSpPr>
       <p:sp>
         <p:nvSpPr>
-          <p:cNvPr id="275081337" name="Title 1"/>
+          <p:cNvPr id="1854292282" name="Title 1"/>
           <p:cNvSpPr>
             <a:spLocks noGrp="1"/>
           </p:cNvSpPr>
@@ -6469,7 +7087,7 @@
       </p:sp>
       <p:sp>
         <p:nvSpPr>
-          <p:cNvPr id="707735196" name="Content Placeholder 2"/>
+          <p:cNvPr id="1920475648" name="Content Placeholder 2"/>
           <p:cNvSpPr>
             <a:spLocks noGrp="1"/>
           </p:cNvSpPr>
@@ -6535,7 +7153,7 @@
       </p:grpSpPr>
       <p:sp>
         <p:nvSpPr>
-          <p:cNvPr id="123154291" name="Title 1"/>
+          <p:cNvPr id="1523617260" name="Title 1"/>
           <p:cNvSpPr>
             <a:spLocks noGrp="1"/>
           </p:cNvSpPr>
@@ -6568,7 +7186,7 @@
       </p:sp>
       <p:pic>
         <p:nvPicPr>
-          <p:cNvPr id="465635647" name=""/>
+          <p:cNvPr id="1645978003" name=""/>
           <p:cNvPicPr>
             <a:picLocks noChangeAspect="1"/>
           </p:cNvPicPr>
@@ -6623,7 +7241,7 @@
       </p:grpSpPr>
       <p:sp>
         <p:nvSpPr>
-          <p:cNvPr id="1301499507" name="Title 1"/>
+          <p:cNvPr id="857444963" name="Title 1"/>
           <p:cNvSpPr>
             <a:spLocks noGrp="1"/>
           </p:cNvSpPr>
@@ -6633,7 +7251,7 @@
         </p:nvSpPr>
         <p:spPr bwMode="auto">
           <a:xfrm flipH="0" flipV="0">
-            <a:off x="838199" y="-44282"/>
+            <a:off x="838198" y="-44282"/>
             <a:ext cx="10515600" cy="1102937"/>
           </a:xfrm>
         </p:spPr>
@@ -6661,7 +7279,7 @@
       </p:sp>
       <p:graphicFrame>
         <p:nvGraphicFramePr>
-          <p:cNvPr id="184446403" name=""/>
+          <p:cNvPr id="300412495" name=""/>
           <p:cNvGraphicFramePr>
             <a:graphicFrameLocks xmlns:a="http://schemas.openxmlformats.org/drawingml/2006/main"/>
           </p:cNvGraphicFramePr>
